--- a/Topic_D/Exam_Practice/TD-L06_Writing_Workshop_Jobs_and_Professions.pptx
+++ b/Topic_D/Exam_Practice/TD-L06_Writing_Workshop_Jobs_and_Professions.pptx
@@ -784,7 +784,11 @@
           <a:lstStyle/>
           <a:p>
             <a:r>
-              <a:rPr lang="en-US" dirty="0"/>
+              <a:rPr lang="ar-SA" dirty="0">
+                <a:latin typeface="Amiri" pitchFamily="2" charset="-78"/>
+                <a:ea typeface="Amiri" pitchFamily="2" charset="-78"/>
+                <a:cs typeface="Amiri" pitchFamily="2" charset="-78"/>
+              </a:rPr>
               <a:t>Q3 (3 min to choose and read). Title (أ) suits Core and Develop; title (ب) suits Stretch.</a:t>
             </a:r>
             <a:endParaRPr lang="en-US" dirty="0"/>
@@ -1403,7 +1407,11 @@
           <a:lstStyle/>
           <a:p>
             <a:r>
-              <a:rPr lang="en-US" dirty="0"/>
+              <a:rPr lang="ar-SA" dirty="0">
+                <a:latin typeface="Amiri" pitchFamily="2" charset="-78"/>
+                <a:ea typeface="Amiri" pitchFamily="2" charset="-78"/>
+                <a:cs typeface="Amiri" pitchFamily="2" charset="-78"/>
+              </a:rPr>
               <a:t>WELCOME (1 min) — while students join.
 • Greet each student by name as they arrive: السَّلَامُ عَلَيْكُمْ. Take the register (Pastoral Tracker: attendance 0/1).
 • 2-MINUTE CHECK-IN (SEND training): a private chat to any student who seemed unsettled last lesson — “Are you okay today? 👍 / 👎”.
@@ -1936,7 +1944,11 @@
           <a:lstStyle/>
           <a:p>
             <a:r>
-              <a:rPr lang="en-US" dirty="0"/>
+              <a:rPr lang="ar-SA" dirty="0">
+                <a:latin typeface="Amiri" pitchFamily="2" charset="-78"/>
+                <a:ea typeface="Amiri" pitchFamily="2" charset="-78"/>
+                <a:cs typeface="Amiri" pitchFamily="2" charset="-78"/>
+              </a:rPr>
               <a:t>Question words: أَيْنَ (where) · مَعَ مَنْ (with whom) · مَاذَا فَعَلْتِ (what did you do — PAST) · المُسْتَقْبَلِ (future — use sa- / urīdu an).</a:t>
             </a:r>
             <a:endParaRPr lang="en-US" dirty="0"/>
@@ -2508,6 +2520,7 @@
                   <a:srgbClr val="D4AF37"/>
                 </a:solidFill>
                 <a:latin typeface="Amiri" pitchFamily="2" charset="-78"/>
+                <a:ea typeface="Amiri" pitchFamily="2" charset="-78"/>
                 <a:cs typeface="Amiri" pitchFamily="2" charset="-78"/>
               </a:rPr>
               <a:t>م</a:t>
@@ -2714,6 +2727,7 @@
                   <a:srgbClr val="D4AF37"/>
                 </a:solidFill>
                 <a:latin typeface="Amiri" pitchFamily="2" charset="-78"/>
+                <a:ea typeface="Amiri" pitchFamily="2" charset="-78"/>
                 <a:cs typeface="Amiri" pitchFamily="2" charset="-78"/>
               </a:rPr>
               <a:t>وَرْشَةُ الكِتَابَةِ — الوَظَائِفُ وَالمِهَنُ</a:t>
@@ -3171,6 +3185,7 @@
                   <a:srgbClr val="D4AF37"/>
                 </a:solidFill>
                 <a:latin typeface="Amiri" pitchFamily="2" charset="-78"/>
+                <a:ea typeface="Amiri" pitchFamily="2" charset="-78"/>
                 <a:cs typeface="Amiri" pitchFamily="2" charset="-78"/>
               </a:rPr>
               <a:t>م</a:t>
@@ -3491,6 +3506,7 @@
                   <a:srgbClr val="8A6D1E"/>
                 </a:solidFill>
                 <a:latin typeface="Amiri" pitchFamily="2" charset="-78"/>
+                <a:ea typeface="Amiri" pitchFamily="2" charset="-78"/>
                 <a:cs typeface="Amiri" pitchFamily="2" charset="-78"/>
               </a:rPr>
               <a:t>نَمُوذَجُ الإِجَابَةِ</a:t>
@@ -3604,6 +3620,7 @@
                   <a:srgbClr val="1F2A37"/>
                 </a:solidFill>
                 <a:latin typeface="Amiri" pitchFamily="2" charset="-78"/>
+                <a:ea typeface="Amiri" pitchFamily="2" charset="-78"/>
                 <a:cs typeface="Amiri" pitchFamily="2" charset="-78"/>
               </a:rPr>
               <a:t>مَرْحَبًا يَا فَاطِمَةُ،</a:t>
@@ -3623,6 +3640,7 @@
                   <a:srgbClr val="1F2A37"/>
                 </a:solidFill>
                 <a:latin typeface="Amiri" pitchFamily="2" charset="-78"/>
+                <a:ea typeface="Amiri" pitchFamily="2" charset="-78"/>
                 <a:cs typeface="Amiri" pitchFamily="2" charset="-78"/>
               </a:rPr>
               <a:t>كَيْفَ حَالُكِ؟ فِي الأُسْبُوعِ المَاضِي قُمْتُ بِتَجْرِبَةِ عَمَلٍ فِي مُسْتَشْفَى الأَطْفَالِ. عَمِلْتُ مَعَ مُمَرِّضَةٍ لَطِيفَةٍ اسْمُهَا سُعَادُ. كُنْتُ أُسَاعِدُهَا فِي تَرْتِيبِ الغُرَفِ، وَأَتَكَلَّمُ مَعَ الأَطْفَالِ المَرْضَى. العَمَلُ كَانَ مُتْعِبًا، لِأَنَّنَا كُنَّا نَمْشِي طُولَ اليَوْمِ، لٰكِنَّهُ كَانَ مُفِيدًا جِدًّا. فِي رَأْيِي، التَّمْرِيضُ مِهْنَةٌ مُهِمَّةٌ وَجَمِيلَةٌ، لٰكِنَّ الرَّاتِبَ مُنْخَفِضٌ. فِي المُسْتَقْبَلِ سَأَدْرُسُ الطِّبَّ، وَأُرِيدُ أَنْ أَكُونَ طَبِيبَةَ أَطْفَالٍ.</a:t>
@@ -3642,6 +3660,7 @@
                   <a:srgbClr val="1F2A37"/>
                 </a:solidFill>
                 <a:latin typeface="Amiri" pitchFamily="2" charset="-78"/>
+                <a:ea typeface="Amiri" pitchFamily="2" charset="-78"/>
                 <a:cs typeface="Amiri" pitchFamily="2" charset="-78"/>
               </a:rPr>
               <a:t>مَعَ حُبِّي،</a:t>
@@ -3661,6 +3680,7 @@
                   <a:srgbClr val="1F2A37"/>
                 </a:solidFill>
                 <a:latin typeface="Amiri" pitchFamily="2" charset="-78"/>
+                <a:ea typeface="Amiri" pitchFamily="2" charset="-78"/>
                 <a:cs typeface="Amiri" pitchFamily="2" charset="-78"/>
               </a:rPr>
               <a:t>رَنَا</a:t>
@@ -3824,11 +3844,12 @@
               <a:buNone/>
             </a:pPr>
             <a:r>
-              <a:rPr lang="en-US" sz="950" b="1" dirty="0">
+              <a:rPr lang="ar-SA" sz="950" b="1" dirty="0">
                 <a:solidFill>
                   <a:srgbClr val="FFFFFF"/>
                 </a:solidFill>
                 <a:latin typeface="Calibri" pitchFamily="34" charset="0"/>
+                <a:ea typeface="Amiri" pitchFamily="2" charset="-78"/>
                 <a:cs typeface="Amiri" pitchFamily="2" charset="-78"/>
               </a:rPr>
               <a:t>مُمَرِّضَةٍ لَطِيفَةٍ</a:t>
@@ -3889,11 +3910,12 @@
               <a:buNone/>
             </a:pPr>
             <a:r>
-              <a:rPr lang="en-US" sz="950" b="1" dirty="0">
+              <a:rPr lang="ar-SA" sz="950" b="1" dirty="0">
                 <a:solidFill>
                   <a:srgbClr val="FFFFFF"/>
                 </a:solidFill>
                 <a:latin typeface="Calibri" pitchFamily="34" charset="0"/>
+                <a:ea typeface="Amiri" pitchFamily="2" charset="-78"/>
                 <a:cs typeface="Amiri" pitchFamily="2" charset="-78"/>
               </a:rPr>
               <a:t>كُنْتُ أُسَاعِدُهَا</a:t>
@@ -3954,11 +3976,12 @@
               <a:buNone/>
             </a:pPr>
             <a:r>
-              <a:rPr lang="en-US" sz="950" b="1" dirty="0">
+              <a:rPr lang="ar-SA" sz="950" b="1" dirty="0">
                 <a:solidFill>
                   <a:srgbClr val="FFFFFF"/>
                 </a:solidFill>
                 <a:latin typeface="Calibri" pitchFamily="34" charset="0"/>
+                <a:ea typeface="Amiri" pitchFamily="2" charset="-78"/>
                 <a:cs typeface="Amiri" pitchFamily="2" charset="-78"/>
               </a:rPr>
               <a:t>كَانَ مُتْعِبًا</a:t>
@@ -4019,11 +4042,12 @@
               <a:buNone/>
             </a:pPr>
             <a:r>
-              <a:rPr lang="en-US" sz="950" b="1" dirty="0">
+              <a:rPr lang="ar-SA" sz="950" b="1" dirty="0">
                 <a:solidFill>
                   <a:srgbClr val="FFFFFF"/>
                 </a:solidFill>
                 <a:latin typeface="Calibri" pitchFamily="34" charset="0"/>
+                <a:ea typeface="Amiri" pitchFamily="2" charset="-78"/>
                 <a:cs typeface="Amiri" pitchFamily="2" charset="-78"/>
               </a:rPr>
               <a:t>أَكُونَ طَبِيبَةَ أَطْفَالٍ</a:t>
@@ -4157,6 +4181,7 @@
                   <a:srgbClr val="D4AF37"/>
                 </a:solidFill>
                 <a:latin typeface="Amiri" pitchFamily="2" charset="-78"/>
+                <a:ea typeface="Amiri" pitchFamily="2" charset="-78"/>
                 <a:cs typeface="Amiri" pitchFamily="2" charset="-78"/>
               </a:rPr>
               <a:t>م</a:t>
@@ -4477,6 +4502,7 @@
                   <a:srgbClr val="8A6D1E"/>
                 </a:solidFill>
                 <a:latin typeface="Amiri" pitchFamily="2" charset="-78"/>
+                <a:ea typeface="Amiri" pitchFamily="2" charset="-78"/>
                 <a:cs typeface="Amiri" pitchFamily="2" charset="-78"/>
               </a:rPr>
               <a:t>نَمُوذَجُ الإِجَابَةِ</a:t>
@@ -4590,6 +4616,7 @@
                   <a:srgbClr val="1F2A37"/>
                 </a:solidFill>
                 <a:latin typeface="Amiri" pitchFamily="2" charset="-78"/>
+                <a:ea typeface="Amiri" pitchFamily="2" charset="-78"/>
                 <a:cs typeface="Amiri" pitchFamily="2" charset="-78"/>
               </a:rPr>
               <a:t>عَزِيزَتِي فَاطِمَةُ،</a:t>
@@ -4609,6 +4636,7 @@
                   <a:srgbClr val="1F2A37"/>
                 </a:solidFill>
                 <a:latin typeface="Amiri" pitchFamily="2" charset="-78"/>
+                <a:ea typeface="Amiri" pitchFamily="2" charset="-78"/>
                 <a:cs typeface="Amiri" pitchFamily="2" charset="-78"/>
               </a:rPr>
               <a:t>أَكْتُبُ إِلَيْكِ بَعْدَ أُسْبُوعٍ لَا يُنْسَى قَضَيْتُهُ فِي تَجْرِبَةِ عَمَلٍ بِمُسْتَشْفَى الأَطْفَالِ، حَيْثُ رَافَقْتُ مُمَرِّضَةً تَعْمَلُ هُنَاكَ مُنْذُ عِشْرِينَ سَنَةً. كَانَتْ مُهِمَّتِي أَنْ أُرَتِّبَ الغُرَفَ، وَأَقْرَأَ القِصَصَ لِلْأَطْفَالِ الَّذِينَ يَنْتَظِرُونَ العَمَلِيَّاتِ، فَتَعَلَّمْتُ أَنَّ الابْتِسَامَةَ دَوَاءٌ أَيْضًا، وَأَنَّ الكَلِمَةَ الطَّيِّبَةَ تُخَفِّفُ الخَوْفَ. صَحِيحٌ أَنَّ العَمَلَ كَانَ مُتْعِبًا، إِذْ لَمْ نَجْلِسْ إِلَّا دَقَائِقَ قَلِيلَةً، غَيْرَ أَنَّنِي لَمْ أَشْعُرْ بِالمَلَلِ لَحْظَةً وَاحِدَةً. وَأَرَى أَنَّ المُمَرِّضِينَ يَسْتَحِقُّونَ رَوَاتِبَ أَعْلَى بِكَثِيرٍ مِمَّا يَحْصُلُونَ عَلَيْهِ. وَإِذَا حَقَّقْتُ دَرَجَاتٍ عَالِيَةً، فَسَأَدْرُسُ الطِّبَّ لِأُصْبِحَ طَبِيبَةَ أَطْفَالٍ.</a:t>
@@ -4628,6 +4656,7 @@
                   <a:srgbClr val="1F2A37"/>
                 </a:solidFill>
                 <a:latin typeface="Amiri" pitchFamily="2" charset="-78"/>
+                <a:ea typeface="Amiri" pitchFamily="2" charset="-78"/>
                 <a:cs typeface="Amiri" pitchFamily="2" charset="-78"/>
               </a:rPr>
               <a:t>بِمَحَبَّةٍ،</a:t>
@@ -4647,6 +4676,7 @@
                   <a:srgbClr val="1F2A37"/>
                 </a:solidFill>
                 <a:latin typeface="Amiri" pitchFamily="2" charset="-78"/>
+                <a:ea typeface="Amiri" pitchFamily="2" charset="-78"/>
                 <a:cs typeface="Amiri" pitchFamily="2" charset="-78"/>
               </a:rPr>
               <a:t>رَنَا</a:t>
@@ -4810,11 +4840,12 @@
               <a:buNone/>
             </a:pPr>
             <a:r>
-              <a:rPr lang="en-US" sz="950" b="1" dirty="0">
+              <a:rPr lang="ar-SA" sz="950" b="1" dirty="0">
                 <a:solidFill>
                   <a:srgbClr val="FFFFFF"/>
                 </a:solidFill>
                 <a:latin typeface="Calibri" pitchFamily="34" charset="0"/>
+                <a:ea typeface="Amiri" pitchFamily="2" charset="-78"/>
                 <a:cs typeface="Amiri" pitchFamily="2" charset="-78"/>
               </a:rPr>
               <a:t>تَعْمَلُ هُنَاكَ مُنْذُ</a:t>
@@ -4875,11 +4906,12 @@
               <a:buNone/>
             </a:pPr>
             <a:r>
-              <a:rPr lang="en-US" sz="950" b="1" dirty="0">
+              <a:rPr lang="ar-SA" sz="950" b="1" dirty="0">
                 <a:solidFill>
                   <a:srgbClr val="FFFFFF"/>
                 </a:solidFill>
                 <a:latin typeface="Calibri" pitchFamily="34" charset="0"/>
+                <a:ea typeface="Amiri" pitchFamily="2" charset="-78"/>
                 <a:cs typeface="Amiri" pitchFamily="2" charset="-78"/>
               </a:rPr>
               <a:t>الَّذِينَ يَنْتَظِرُونَ</a:t>
@@ -4940,11 +4972,12 @@
               <a:buNone/>
             </a:pPr>
             <a:r>
-              <a:rPr lang="en-US" sz="950" b="1" dirty="0">
+              <a:rPr lang="ar-SA" sz="950" b="1" dirty="0">
                 <a:solidFill>
                   <a:srgbClr val="FFFFFF"/>
                 </a:solidFill>
                 <a:latin typeface="Calibri" pitchFamily="34" charset="0"/>
+                <a:ea typeface="Amiri" pitchFamily="2" charset="-78"/>
                 <a:cs typeface="Amiri" pitchFamily="2" charset="-78"/>
               </a:rPr>
               <a:t>لَمْ نَجْلِسْ إِلَّا</a:t>
@@ -5005,11 +5038,12 @@
               <a:buNone/>
             </a:pPr>
             <a:r>
-              <a:rPr lang="en-US" sz="950" b="1" dirty="0">
+              <a:rPr lang="ar-SA" sz="950" b="1" dirty="0">
                 <a:solidFill>
                   <a:srgbClr val="FFFFFF"/>
                 </a:solidFill>
                 <a:latin typeface="Calibri" pitchFamily="34" charset="0"/>
+                <a:ea typeface="Amiri" pitchFamily="2" charset="-78"/>
                 <a:cs typeface="Amiri" pitchFamily="2" charset="-78"/>
               </a:rPr>
               <a:t>إِذَا حَقَّقْتُ … فَسَأَدْرُسُ</a:t>
@@ -5143,6 +5177,7 @@
                   <a:srgbClr val="D4AF37"/>
                 </a:solidFill>
                 <a:latin typeface="Amiri" pitchFamily="2" charset="-78"/>
+                <a:ea typeface="Amiri" pitchFamily="2" charset="-78"/>
                 <a:cs typeface="Amiri" pitchFamily="2" charset="-78"/>
               </a:rPr>
               <a:t>م</a:t>
@@ -5463,6 +5498,7 @@
                   <a:srgbClr val="8A6D1E"/>
                 </a:solidFill>
                 <a:latin typeface="Amiri" pitchFamily="2" charset="-78"/>
+                <a:ea typeface="Amiri" pitchFamily="2" charset="-78"/>
                 <a:cs typeface="Amiri" pitchFamily="2" charset="-78"/>
               </a:rPr>
               <a:t>اخْتَرْ عُنْوَانًا وَاحِدًا</a:t>
@@ -5743,6 +5779,7 @@
                   <a:srgbClr val="1B3B6F"/>
                 </a:solidFill>
                 <a:latin typeface="Amiri" pitchFamily="2" charset="-78"/>
+                <a:ea typeface="Amiri" pitchFamily="2" charset="-78"/>
                 <a:cs typeface="Amiri" pitchFamily="2" charset="-78"/>
               </a:rPr>
               <a:t>المِهَنُ فِي أُسْرَتِي</a:t>
@@ -5781,6 +5818,7 @@
                   <a:srgbClr val="1B3B6F"/>
                 </a:solidFill>
                 <a:latin typeface="Amiri" pitchFamily="2" charset="-78"/>
+                <a:ea typeface="Amiri" pitchFamily="2" charset="-78"/>
                 <a:cs typeface="Amiri" pitchFamily="2" charset="-78"/>
               </a:rPr>
               <a:t>(أ)</a:t>
@@ -5887,6 +5925,7 @@
                   <a:srgbClr val="1B3B6F"/>
                 </a:solidFill>
                 <a:latin typeface="Amiri" pitchFamily="2" charset="-78"/>
+                <a:ea typeface="Amiri" pitchFamily="2" charset="-78"/>
                 <a:cs typeface="Amiri" pitchFamily="2" charset="-78"/>
               </a:rPr>
               <a:t>مِهَنُ أَفْرَادِ أُسْرَتِكَ · مَزَايَا هٰذِهِ المِهَنِ وَعُيُوبُهَا · تَجْرِبَةُ عَمَلٍ أَوْ حُلْمُ طُفُولَةٍ · المِهْنَةُ الَّتِي سَتَخْتَارُهَا</a:t>
@@ -6018,6 +6057,7 @@
                   <a:srgbClr val="1B3B6F"/>
                 </a:solidFill>
                 <a:latin typeface="Amiri" pitchFamily="2" charset="-78"/>
+                <a:ea typeface="Amiri" pitchFamily="2" charset="-78"/>
                 <a:cs typeface="Amiri" pitchFamily="2" charset="-78"/>
               </a:rPr>
               <a:t>مِهَنُ المُسْتَقْبَلِ</a:t>
@@ -6056,6 +6096,7 @@
                   <a:srgbClr val="1B3B6F"/>
                 </a:solidFill>
                 <a:latin typeface="Amiri" pitchFamily="2" charset="-78"/>
+                <a:ea typeface="Amiri" pitchFamily="2" charset="-78"/>
                 <a:cs typeface="Amiri" pitchFamily="2" charset="-78"/>
               </a:rPr>
               <a:t>(ب)</a:t>
@@ -6162,6 +6203,7 @@
                   <a:srgbClr val="1B3B6F"/>
                 </a:solidFill>
                 <a:latin typeface="Amiri" pitchFamily="2" charset="-78"/>
+                <a:ea typeface="Amiri" pitchFamily="2" charset="-78"/>
                 <a:cs typeface="Amiri" pitchFamily="2" charset="-78"/>
               </a:rPr>
               <a:t>سُوقُ العَمَلِ يَتَغَيَّرُ · المِهَنُ المُهَدَّدَةُ وَالمِهَنُ الآمِنَةُ · مِثَالٌ مِنَ الوَاقِعِ · رَأْيُكَ وَنَصِيحَتُكَ</a:t>
@@ -6361,6 +6403,7 @@
                   <a:srgbClr val="D4AF37"/>
                 </a:solidFill>
                 <a:latin typeface="Amiri" pitchFamily="2" charset="-78"/>
+                <a:ea typeface="Amiri" pitchFamily="2" charset="-78"/>
                 <a:cs typeface="Amiri" pitchFamily="2" charset="-78"/>
               </a:rPr>
               <a:t>م</a:t>
@@ -6681,6 +6724,7 @@
                   <a:srgbClr val="8A6D1E"/>
                 </a:solidFill>
                 <a:latin typeface="Amiri" pitchFamily="2" charset="-78"/>
+                <a:ea typeface="Amiri" pitchFamily="2" charset="-78"/>
                 <a:cs typeface="Amiri" pitchFamily="2" charset="-78"/>
               </a:rPr>
               <a:t>خُطَّةُ الكِتَابَةِ</a:t>
@@ -7305,6 +7349,7 @@
                   <a:srgbClr val="1B3B6F"/>
                 </a:solidFill>
                 <a:latin typeface="Amiri" pitchFamily="2" charset="-78"/>
+                <a:ea typeface="Amiri" pitchFamily="2" charset="-78"/>
                 <a:cs typeface="Amiri" pitchFamily="2" charset="-78"/>
               </a:rPr>
               <a:t>أَبِي مُهَنْدِسٌ، وَأُمِّي مُعَلِّمَةٌ.</a:t>
@@ -7404,6 +7449,7 @@
                   <a:srgbClr val="1B3B6F"/>
                 </a:solidFill>
                 <a:latin typeface="Amiri" pitchFamily="2" charset="-78"/>
+                <a:ea typeface="Amiri" pitchFamily="2" charset="-78"/>
                 <a:cs typeface="Amiri" pitchFamily="2" charset="-78"/>
               </a:rPr>
               <a:t>كُنْتُ أُرِيدُ أَنْ أَكُونَ لَاعِبَ كُرَةِ قَدَمٍ.</a:t>
@@ -7503,6 +7549,7 @@
                   <a:srgbClr val="1B3B6F"/>
                 </a:solidFill>
                 <a:latin typeface="Amiri" pitchFamily="2" charset="-78"/>
+                <a:ea typeface="Amiri" pitchFamily="2" charset="-78"/>
                 <a:cs typeface="Amiri" pitchFamily="2" charset="-78"/>
               </a:rPr>
               <a:t>سَأُصْبِحُ مُحَامِيًا، لِأَنِّي أُرِيدُ أَنْ أُسَاعِدَ النَّاسَ.</a:t>
@@ -7664,6 +7711,7 @@
                   <a:srgbClr val="1F2A37"/>
                 </a:solidFill>
                 <a:latin typeface="Amiri" pitchFamily="2" charset="-78"/>
+                <a:ea typeface="Amiri" pitchFamily="2" charset="-78"/>
                 <a:cs typeface="Amiri" pitchFamily="2" charset="-78"/>
               </a:rPr>
               <a:t>أ</a:t>
@@ -7690,6 +7738,7 @@
                   <a:srgbClr val="1F2A37"/>
                 </a:solidFill>
                 <a:latin typeface="Amiri" pitchFamily="2" charset="-78"/>
+                <a:ea typeface="Amiri" pitchFamily="2" charset="-78"/>
                 <a:cs typeface="Amiri" pitchFamily="2" charset="-78"/>
               </a:rPr>
               <a:t>ب</a:t>
@@ -7836,6 +7885,7 @@
                   <a:srgbClr val="D4AF37"/>
                 </a:solidFill>
                 <a:latin typeface="Amiri" pitchFamily="2" charset="-78"/>
+                <a:ea typeface="Amiri" pitchFamily="2" charset="-78"/>
                 <a:cs typeface="Amiri" pitchFamily="2" charset="-78"/>
               </a:rPr>
               <a:t>م</a:t>
@@ -8093,6 +8143,7 @@
                   <a:srgbClr val="8A6D1E"/>
                 </a:solidFill>
                 <a:latin typeface="Amiri" pitchFamily="2" charset="-78"/>
+                <a:ea typeface="Amiri" pitchFamily="2" charset="-78"/>
                 <a:cs typeface="Amiri" pitchFamily="2" charset="-78"/>
               </a:rPr>
               <a:t>أ</a:t>
@@ -8157,6 +8208,7 @@
                   <a:srgbClr val="1B3B6F"/>
                 </a:solidFill>
                 <a:latin typeface="Amiri" pitchFamily="2" charset="-78"/>
+                <a:ea typeface="Amiri" pitchFamily="2" charset="-78"/>
                 <a:cs typeface="Amiri" pitchFamily="2" charset="-78"/>
               </a:rPr>
               <a:t>أ</a:t>
@@ -8208,6 +8260,7 @@
                   <a:srgbClr val="8A6D1E"/>
                 </a:solidFill>
                 <a:latin typeface="Amiri" pitchFamily="2" charset="-78"/>
+                <a:ea typeface="Amiri" pitchFamily="2" charset="-78"/>
                 <a:cs typeface="Amiri" pitchFamily="2" charset="-78"/>
               </a:rPr>
               <a:t>نَمُوذَجُ الإِجَابَةِ</a:t>
@@ -8321,6 +8374,7 @@
                   <a:srgbClr val="1F2A37"/>
                 </a:solidFill>
                 <a:latin typeface="Amiri" pitchFamily="2" charset="-78"/>
+                <a:ea typeface="Amiri" pitchFamily="2" charset="-78"/>
                 <a:cs typeface="Amiri" pitchFamily="2" charset="-78"/>
               </a:rPr>
               <a:t>فِي أُسْرَتِي مِهَنٌ كَثِيرَةٌ وَمُخْتَلِفَةٌ. أَبِي مُهَنْدِسٌ، وَيَعْمَلُ فِي شَرِكَةٍ كَبِيرَةٍ لِلْبِنَاءِ. أُمِّي مُعَلِّمَةُ عُلُومٍ فِي مَدْرَسَةٍ ثَانَوِيَّةٍ. أَخِي الكَبِيرُ مُبَرْمِجٌ، وَيَعْمَلُ مِنَ البَيْتِ. أُخْتِي تَدْرُسُ الطِّبَّ فِي الجَامِعَةِ، وَسَتُصْبِحُ طَبِيبَةً بَعْدَ سَنَتَيْنِ.</a:t>
@@ -8340,6 +8394,7 @@
                   <a:srgbClr val="1F2A37"/>
                 </a:solidFill>
                 <a:latin typeface="Amiri" pitchFamily="2" charset="-78"/>
+                <a:ea typeface="Amiri" pitchFamily="2" charset="-78"/>
                 <a:cs typeface="Amiri" pitchFamily="2" charset="-78"/>
               </a:rPr>
               <a:t>أُحِبُّ عَمَلَ أَبِي، لِأَنَّهُ يُصَمِّمُ مَبَانِيَ جَمِيلَةً. لٰكِنَّ عَمَلَهُ مُتْعِبٌ، لِأَنَّهُ يُسَافِرُ كَثِيرًا. أَمَّا أُمِّي فَعَمَلُهَا مُفِيدٌ، وَعِنْدَهَا عُطَلٌ طَوِيلَةٌ، لٰكِنَّهَا تُصَحِّحُ الوَاجِبَاتِ فِي المَسَاءِ.</a:t>
@@ -8359,6 +8414,7 @@
                   <a:srgbClr val="1F2A37"/>
                 </a:solidFill>
                 <a:latin typeface="Amiri" pitchFamily="2" charset="-78"/>
+                <a:ea typeface="Amiri" pitchFamily="2" charset="-78"/>
                 <a:cs typeface="Amiri" pitchFamily="2" charset="-78"/>
               </a:rPr>
               <a:t>عِنْدَمَا كُنْتُ صَغِيرًا، كُنْتُ أُرِيدُ أَنْ أَكُونَ لَاعِبَ كُرَةِ قَدَمٍ. فِي السَّنَةِ المَاضِيَةِ قُمْتُ بِتَجْرِبَةِ عَمَلٍ فِي مَكْتَبِ مُحَامٍ. كَانَ العَمَلُ هَادِئًا، وَتَعَلَّمْتُ أَشْيَاءَ كَثِيرَةً عَنِ القَانُونِ، وَكَتَبْتُ رَسَائِلَ رَسْمِيَّةً لِلْمُحَامِي.</a:t>
@@ -8378,6 +8434,7 @@
                   <a:srgbClr val="1F2A37"/>
                 </a:solidFill>
                 <a:latin typeface="Amiri" pitchFamily="2" charset="-78"/>
+                <a:ea typeface="Amiri" pitchFamily="2" charset="-78"/>
                 <a:cs typeface="Amiri" pitchFamily="2" charset="-78"/>
               </a:rPr>
               <a:t>فِي رَأْيِي، أَهَمُّ شَيْءٍ أَنْ نُحِبَّ عَمَلَنَا. فِي المُسْتَقْبَلِ سَأَدْرُسُ القَانُونَ فِي الجَامِعَةِ، وَسَأُصْبِحُ مُحَامِيًا، لِأَنِّي أُرِيدُ أَنْ أُسَاعِدَ النَّاسَ وَأُدَافِعَ عَنْهُمْ.</a:t>
@@ -8541,11 +8598,12 @@
               <a:buNone/>
             </a:pPr>
             <a:r>
-              <a:rPr lang="en-US" sz="950" b="1" dirty="0">
+              <a:rPr lang="ar-SA" sz="950" b="1" dirty="0">
                 <a:solidFill>
                   <a:srgbClr val="FFFFFF"/>
                 </a:solidFill>
                 <a:latin typeface="Calibri" pitchFamily="34" charset="0"/>
+                <a:ea typeface="Amiri" pitchFamily="2" charset="-78"/>
                 <a:cs typeface="Amiri" pitchFamily="2" charset="-78"/>
               </a:rPr>
               <a:t>أَبِي مُهَنْدِسٌ</a:t>
@@ -8606,11 +8664,12 @@
               <a:buNone/>
             </a:pPr>
             <a:r>
-              <a:rPr lang="en-US" sz="950" b="1" dirty="0">
+              <a:rPr lang="ar-SA" sz="950" b="1" dirty="0">
                 <a:solidFill>
                   <a:srgbClr val="FFFFFF"/>
                 </a:solidFill>
                 <a:latin typeface="Calibri" pitchFamily="34" charset="0"/>
+                <a:ea typeface="Amiri" pitchFamily="2" charset="-78"/>
                 <a:cs typeface="Amiri" pitchFamily="2" charset="-78"/>
               </a:rPr>
               <a:t>أَمَّا أُمِّي فَعَمَلُهَا</a:t>
@@ -8671,11 +8730,12 @@
               <a:buNone/>
             </a:pPr>
             <a:r>
-              <a:rPr lang="en-US" sz="950" b="1" dirty="0">
+              <a:rPr lang="ar-SA" sz="950" b="1" dirty="0">
                 <a:solidFill>
                   <a:srgbClr val="FFFFFF"/>
                 </a:solidFill>
                 <a:latin typeface="Calibri" pitchFamily="34" charset="0"/>
+                <a:ea typeface="Amiri" pitchFamily="2" charset="-78"/>
                 <a:cs typeface="Amiri" pitchFamily="2" charset="-78"/>
               </a:rPr>
               <a:t>كُنْتُ أُرِيدُ أَنْ أَكُونَ</a:t>
@@ -8736,11 +8796,12 @@
               <a:buNone/>
             </a:pPr>
             <a:r>
-              <a:rPr lang="en-US" sz="950" b="1" dirty="0">
+              <a:rPr lang="ar-SA" sz="950" b="1" dirty="0">
                 <a:solidFill>
                   <a:srgbClr val="FFFFFF"/>
                 </a:solidFill>
                 <a:latin typeface="Calibri" pitchFamily="34" charset="0"/>
+                <a:ea typeface="Amiri" pitchFamily="2" charset="-78"/>
                 <a:cs typeface="Amiri" pitchFamily="2" charset="-78"/>
               </a:rPr>
               <a:t>سَأُصْبِحُ مُحَامِيًا</a:t>
@@ -8874,6 +8935,7 @@
                   <a:srgbClr val="D4AF37"/>
                 </a:solidFill>
                 <a:latin typeface="Amiri" pitchFamily="2" charset="-78"/>
+                <a:ea typeface="Amiri" pitchFamily="2" charset="-78"/>
                 <a:cs typeface="Amiri" pitchFamily="2" charset="-78"/>
               </a:rPr>
               <a:t>م</a:t>
@@ -9131,6 +9193,7 @@
                   <a:srgbClr val="8A6D1E"/>
                 </a:solidFill>
                 <a:latin typeface="Amiri" pitchFamily="2" charset="-78"/>
+                <a:ea typeface="Amiri" pitchFamily="2" charset="-78"/>
                 <a:cs typeface="Amiri" pitchFamily="2" charset="-78"/>
               </a:rPr>
               <a:t>أ</a:t>
@@ -9195,6 +9258,7 @@
                   <a:srgbClr val="1B3B6F"/>
                 </a:solidFill>
                 <a:latin typeface="Amiri" pitchFamily="2" charset="-78"/>
+                <a:ea typeface="Amiri" pitchFamily="2" charset="-78"/>
                 <a:cs typeface="Amiri" pitchFamily="2" charset="-78"/>
               </a:rPr>
               <a:t>أ</a:t>
@@ -9246,6 +9310,7 @@
                   <a:srgbClr val="8A6D1E"/>
                 </a:solidFill>
                 <a:latin typeface="Amiri" pitchFamily="2" charset="-78"/>
+                <a:ea typeface="Amiri" pitchFamily="2" charset="-78"/>
                 <a:cs typeface="Amiri" pitchFamily="2" charset="-78"/>
               </a:rPr>
               <a:t>نَمُوذَجُ الإِجَابَةِ</a:t>
@@ -9359,6 +9424,7 @@
                   <a:srgbClr val="1F2A37"/>
                 </a:solidFill>
                 <a:latin typeface="Amiri" pitchFamily="2" charset="-78"/>
+                <a:ea typeface="Amiri" pitchFamily="2" charset="-78"/>
                 <a:cs typeface="Amiri" pitchFamily="2" charset="-78"/>
               </a:rPr>
               <a:t>يُقَالُ إِنَّ مَنْ يَعْمَلُ فِيمَا يُحِبُّ لَا يَعْمَلُ يَوْمًا وَاحِدًا فِي حَيَاتِهِ، وَهٰذَا مَا أَرَاهُ فِي أُسْرَتِي الَّتِي تَجْمَعُ مِهَنًا مُتَنَوِّعَةً: فَأَبِي مُهَنْدِسٌ مَدَنِيٌّ، وَأُمِّي صَيْدَلَانِيَّةٌ، وَخَالِي طَاهٍ فِي فُنْدُقٍ مَشْهُورٍ، وَعَمَّتِي صَحَفِيَّةٌ تُسَافِرُ حَوْلَ العَالَمِ.</a:t>
@@ -9378,6 +9444,7 @@
                   <a:srgbClr val="1F2A37"/>
                 </a:solidFill>
                 <a:latin typeface="Amiri" pitchFamily="2" charset="-78"/>
+                <a:ea typeface="Amiri" pitchFamily="2" charset="-78"/>
                 <a:cs typeface="Amiri" pitchFamily="2" charset="-78"/>
               </a:rPr>
               <a:t>وَلِكُلِّ مِهْنَةٍ مَزَايَاهَا وَعُيُوبُهَا؛ فَأَبِي يُصَمِّمُ جُسُورًا يَسْتَخْدِمُهَا آلَافُ النَّاسِ، لٰكِنَّهُ يَقْضِي أَسَابِيعَ بَعِيدًا عَنَّا. أَمَّا أُمِّي فَتَعْمَلُ سَاعَاتٍ مُنْتَظِمَةً قُرْبَ البَيْتِ، غَيْرَ أَنَّ رَاتِبَهَا أَقَلُّ مِنْ رَاتِبِهِ بِكَثِيرٍ.</a:t>
@@ -9397,6 +9464,7 @@
                   <a:srgbClr val="1F2A37"/>
                 </a:solidFill>
                 <a:latin typeface="Amiri" pitchFamily="2" charset="-78"/>
+                <a:ea typeface="Amiri" pitchFamily="2" charset="-78"/>
                 <a:cs typeface="Amiri" pitchFamily="2" charset="-78"/>
               </a:rPr>
               <a:t>وَقَدْ عِشْتُ تَجْرِبَةً غَيَّرَتْ أَفْكَارِي عَنِ العَمَلِ، عِنْدَمَا قَضَيْتُ أُسْبُوعًا مَعَ خَالِي فِي مَطْبَخِ الفُنْدُقِ؛ فَقَدْ رَأَيْتُ طُهَاةً يَعْمَلُونَ تِسْعَ سَاعَاتٍ بِلَا تَوَقُّفٍ، وَمَعَ ذٰلِكَ كَانُوا يَضْحَكُونَ وَيُغَنُّونَ، لِأَنَّهُمْ يُحِبُّونَ مَا يَصْنَعُونَ، وَيَفْخَرُونَ بِكُلِّ طَبَقٍ يَخْرُجُ مِنْ مَطْبَخِهِمْ.</a:t>
@@ -9416,6 +9484,7 @@
                   <a:srgbClr val="1F2A37"/>
                 </a:solidFill>
                 <a:latin typeface="Amiri" pitchFamily="2" charset="-78"/>
+                <a:ea typeface="Amiri" pitchFamily="2" charset="-78"/>
                 <a:cs typeface="Amiri" pitchFamily="2" charset="-78"/>
               </a:rPr>
               <a:t>صَحِيحٌ أَنَّ الرَّاتِبَ مُهِمٌّ، غَيْرَ أَنَّ الشَّغَفَ هُوَ مَا يَجْعَلُ العَمَلَ مُحْتَمَلًا وَمُمْتِعًا. وَلَوْ خُيِّرْتُ بَيْنَ وَظِيفَةٍ مُرِيحَةٍ أَكْرَهُهَا وَأُخْرَى مُتْعِبَةٍ أُحِبُّهَا، لَاخْتَرْتُ الثَّانِيَةَ دُونَ أَيِّ تَرَدُّدٍ.</a:t>
@@ -9514,11 +9583,12 @@
               <a:buNone/>
             </a:pPr>
             <a:r>
-              <a:rPr lang="en-US" sz="950" b="1" dirty="0">
+              <a:rPr lang="ar-SA" sz="950" b="1" dirty="0">
                 <a:solidFill>
                   <a:srgbClr val="FFFFFF"/>
                 </a:solidFill>
                 <a:latin typeface="Calibri" pitchFamily="34" charset="0"/>
+                <a:ea typeface="Amiri" pitchFamily="2" charset="-78"/>
                 <a:cs typeface="Amiri" pitchFamily="2" charset="-78"/>
               </a:rPr>
               <a:t>يُقَالُ إِنَّ مَنْ</a:t>
@@ -9579,11 +9649,12 @@
               <a:buNone/>
             </a:pPr>
             <a:r>
-              <a:rPr lang="en-US" sz="950" b="1" dirty="0">
+              <a:rPr lang="ar-SA" sz="950" b="1" dirty="0">
                 <a:solidFill>
                   <a:srgbClr val="FFFFFF"/>
                 </a:solidFill>
                 <a:latin typeface="Calibri" pitchFamily="34" charset="0"/>
+                <a:ea typeface="Amiri" pitchFamily="2" charset="-78"/>
                 <a:cs typeface="Amiri" pitchFamily="2" charset="-78"/>
               </a:rPr>
               <a:t>يَسْتَخْدِمُهَا آلَافُ</a:t>
@@ -9644,11 +9715,12 @@
               <a:buNone/>
             </a:pPr>
             <a:r>
-              <a:rPr lang="en-US" sz="950" b="1" dirty="0">
+              <a:rPr lang="ar-SA" sz="950" b="1" dirty="0">
                 <a:solidFill>
                   <a:srgbClr val="FFFFFF"/>
                 </a:solidFill>
                 <a:latin typeface="Calibri" pitchFamily="34" charset="0"/>
+                <a:ea typeface="Amiri" pitchFamily="2" charset="-78"/>
                 <a:cs typeface="Amiri" pitchFamily="2" charset="-78"/>
               </a:rPr>
               <a:t>وَمَعَ ذٰلِكَ كَانُوا</a:t>
@@ -9709,11 +9781,12 @@
               <a:buNone/>
             </a:pPr>
             <a:r>
-              <a:rPr lang="en-US" sz="950" b="1" dirty="0">
+              <a:rPr lang="ar-SA" sz="950" b="1" dirty="0">
                 <a:solidFill>
                   <a:srgbClr val="FFFFFF"/>
                 </a:solidFill>
                 <a:latin typeface="Calibri" pitchFamily="34" charset="0"/>
+                <a:ea typeface="Amiri" pitchFamily="2" charset="-78"/>
                 <a:cs typeface="Amiri" pitchFamily="2" charset="-78"/>
               </a:rPr>
               <a:t>لَوْ خُيِّرْتُ … لَاخْتَرْتُ</a:t>
@@ -9847,6 +9920,7 @@
                   <a:srgbClr val="D4AF37"/>
                 </a:solidFill>
                 <a:latin typeface="Amiri" pitchFamily="2" charset="-78"/>
+                <a:ea typeface="Amiri" pitchFamily="2" charset="-78"/>
                 <a:cs typeface="Amiri" pitchFamily="2" charset="-78"/>
               </a:rPr>
               <a:t>م</a:t>
@@ -10104,6 +10178,7 @@
                   <a:srgbClr val="8A6D1E"/>
                 </a:solidFill>
                 <a:latin typeface="Amiri" pitchFamily="2" charset="-78"/>
+                <a:ea typeface="Amiri" pitchFamily="2" charset="-78"/>
                 <a:cs typeface="Amiri" pitchFamily="2" charset="-78"/>
               </a:rPr>
               <a:t>ب</a:t>
@@ -10168,6 +10243,7 @@
                   <a:srgbClr val="1B3B6F"/>
                 </a:solidFill>
                 <a:latin typeface="Amiri" pitchFamily="2" charset="-78"/>
+                <a:ea typeface="Amiri" pitchFamily="2" charset="-78"/>
                 <a:cs typeface="Amiri" pitchFamily="2" charset="-78"/>
               </a:rPr>
               <a:t>ب</a:t>
@@ -10219,6 +10295,7 @@
                   <a:srgbClr val="8A6D1E"/>
                 </a:solidFill>
                 <a:latin typeface="Amiri" pitchFamily="2" charset="-78"/>
+                <a:ea typeface="Amiri" pitchFamily="2" charset="-78"/>
                 <a:cs typeface="Amiri" pitchFamily="2" charset="-78"/>
               </a:rPr>
               <a:t>نَمُوذَجُ الإِجَابَةِ</a:t>
@@ -10332,6 +10409,7 @@
                   <a:srgbClr val="1F2A37"/>
                 </a:solidFill>
                 <a:latin typeface="Amiri" pitchFamily="2" charset="-78"/>
+                <a:ea typeface="Amiri" pitchFamily="2" charset="-78"/>
                 <a:cs typeface="Amiri" pitchFamily="2" charset="-78"/>
               </a:rPr>
               <a:t>يَتَغَيَّرُ سُوقُ العَمَلِ بِسُرْعَةٍ لَمْ يَشْهَدْهَا التَّارِيخُ؛ فَمِهَنٌ كَانَتْ تُعَدُّ آمِنَةً قَبْلَ عِشْرِينَ سَنَةً بَدَأَتْ تَخْتَفِي، بَيْنَمَا ظَهَرَتْ مِهَنٌ جَدِيدَةٌ لَمْ يَتَخَيَّلْهَا أَحَدٌ. فَأَيُّ مِهَنٍ سَتَبْقَى فِي المُسْتَقْبَلِ؟</a:t>
@@ -10351,6 +10429,7 @@
                   <a:srgbClr val="1F2A37"/>
                 </a:solidFill>
                 <a:latin typeface="Amiri" pitchFamily="2" charset="-78"/>
+                <a:ea typeface="Amiri" pitchFamily="2" charset="-78"/>
                 <a:cs typeface="Amiri" pitchFamily="2" charset="-78"/>
               </a:rPr>
               <a:t>مِنْ نَاحِيَةٍ، يَسْتَطِيعُ الذَّكَاءُ الاصْطِنَاعِيُّ اليَوْمَ أَنْ يَكْتُبَ التَّقَارِيرَ، وَيُتَرْجِمَ النُّصُوصَ، وَيُجِيبَ عَنْ أَسْئِلَةِ العُمَلَاءِ، مِمَّا يُهَدِّدُ كَثِيرًا مِنْ وَظَائِفِ المَكَاتِبِ وَالبُنُوكِ. وَمِنْ نَاحِيَةٍ أُخْرَى، تَبْقَى المِهَنُ الَّتِي تَحْتَاجُ إِلَى التَّعَاطُفِ الإِنْسَانِيِّ، كَالتَّمْرِيضِ وَالتَّعْلِيمِ، صَعْبَةً عَلَى الآلَاتِ.</a:t>
@@ -10370,6 +10449,7 @@
                   <a:srgbClr val="1F2A37"/>
                 </a:solidFill>
                 <a:latin typeface="Amiri" pitchFamily="2" charset="-78"/>
+                <a:ea typeface="Amiri" pitchFamily="2" charset="-78"/>
                 <a:cs typeface="Amiri" pitchFamily="2" charset="-78"/>
               </a:rPr>
               <a:t>وَقَدْ لَاحَظْتُ ذٰلِكَ فِي حَيَاةِ عَمَّتِي، الَّتِي كَانَتْ تَعْمَلُ مُوَظَّفَةَ اسْتِقْبَالٍ فِي بَنْكٍ، ثُمَّ اسْتُبْدِلَتْ وَظِيفَتُهَا بِتَطْبِيقٍ إِلِكْتْرُونِيٍّ. فَعَادَتْ إِلَى الدِّرَاسَةِ وَهِيَ فِي الأَرْبَعِينَ، وَأَصْبَحَتِ اليَوْمَ مُدَرِّبَةً فِي المَهَارَاتِ الرَّقْمِيَّةِ، تُعَلِّمُ مُوَظَّفِينَ فَقَدُوا وَظَائِفَهُمْ مِثْلَهَا.</a:t>
@@ -10389,6 +10469,7 @@
                   <a:srgbClr val="1F2A37"/>
                 </a:solidFill>
                 <a:latin typeface="Amiri" pitchFamily="2" charset="-78"/>
+                <a:ea typeface="Amiri" pitchFamily="2" charset="-78"/>
                 <a:cs typeface="Amiri" pitchFamily="2" charset="-78"/>
               </a:rPr>
               <a:t>صَحِيحٌ أَنَّ التِّكْنُولُوجْيَا تُلْغِي بَعْضَ الوَظَائِفِ، غَيْرَ أَنَّهَا تَخْلُقُ غَيْرَهَا، كَمَا حَدَثَ فِي كُلِّ ثَوْرَةٍ صِنَاعِيَّةٍ سَابِقَةٍ. وَإِذَا تَعَلَّمَ الشَّبَابُ أَنْ يَتَكَيَّفُوا وَيَتَعَلَّمُوا طُوالَ حَيَاتِهِمْ، فَلَنْ يَخَافُوا مِنَ المُسْتَقْبَلِ، بَلْ سَيَصْنَعُونَهُ.</a:t>
@@ -10487,11 +10568,12 @@
               <a:buNone/>
             </a:pPr>
             <a:r>
-              <a:rPr lang="en-US" sz="950" b="1" dirty="0">
+              <a:rPr lang="ar-SA" sz="950" b="1" dirty="0">
                 <a:solidFill>
                   <a:srgbClr val="FFFFFF"/>
                 </a:solidFill>
                 <a:latin typeface="Calibri" pitchFamily="34" charset="0"/>
+                <a:ea typeface="Amiri" pitchFamily="2" charset="-78"/>
                 <a:cs typeface="Amiri" pitchFamily="2" charset="-78"/>
               </a:rPr>
               <a:t>كَانَتْ تُعَدُّ آمِنَةً</a:t>
@@ -10552,11 +10634,12 @@
               <a:buNone/>
             </a:pPr>
             <a:r>
-              <a:rPr lang="en-US" sz="950" b="1" dirty="0">
+              <a:rPr lang="ar-SA" sz="950" b="1" dirty="0">
                 <a:solidFill>
                   <a:srgbClr val="FFFFFF"/>
                 </a:solidFill>
                 <a:latin typeface="Calibri" pitchFamily="34" charset="0"/>
+                <a:ea typeface="Amiri" pitchFamily="2" charset="-78"/>
                 <a:cs typeface="Amiri" pitchFamily="2" charset="-78"/>
               </a:rPr>
               <a:t>مِمَّا يُهَدِّدُ</a:t>
@@ -10617,11 +10700,12 @@
               <a:buNone/>
             </a:pPr>
             <a:r>
-              <a:rPr lang="en-US" sz="950" b="1" dirty="0">
+              <a:rPr lang="ar-SA" sz="950" b="1" dirty="0">
                 <a:solidFill>
                   <a:srgbClr val="FFFFFF"/>
                 </a:solidFill>
                 <a:latin typeface="Calibri" pitchFamily="34" charset="0"/>
+                <a:ea typeface="Amiri" pitchFamily="2" charset="-78"/>
                 <a:cs typeface="Amiri" pitchFamily="2" charset="-78"/>
               </a:rPr>
               <a:t>ثُمَّ اسْتُبْدِلَتْ</a:t>
@@ -10682,11 +10766,12 @@
               <a:buNone/>
             </a:pPr>
             <a:r>
-              <a:rPr lang="en-US" sz="950" b="1" dirty="0">
+              <a:rPr lang="ar-SA" sz="950" b="1" dirty="0">
                 <a:solidFill>
                   <a:srgbClr val="FFFFFF"/>
                 </a:solidFill>
                 <a:latin typeface="Calibri" pitchFamily="34" charset="0"/>
+                <a:ea typeface="Amiri" pitchFamily="2" charset="-78"/>
                 <a:cs typeface="Amiri" pitchFamily="2" charset="-78"/>
               </a:rPr>
               <a:t>فَلَنْ يَخَافُوا … بَلْ</a:t>
@@ -10820,6 +10905,7 @@
                   <a:srgbClr val="D4AF37"/>
                 </a:solidFill>
                 <a:latin typeface="Amiri" pitchFamily="2" charset="-78"/>
+                <a:ea typeface="Amiri" pitchFamily="2" charset="-78"/>
                 <a:cs typeface="Amiri" pitchFamily="2" charset="-78"/>
               </a:rPr>
               <a:t>م</a:t>
@@ -11140,6 +11226,7 @@
                   <a:srgbClr val="8A6D1E"/>
                 </a:solidFill>
                 <a:latin typeface="Amiri" pitchFamily="2" charset="-78"/>
+                <a:ea typeface="Amiri" pitchFamily="2" charset="-78"/>
                 <a:cs typeface="Amiri" pitchFamily="2" charset="-78"/>
               </a:rPr>
               <a:t>قَيِّمْ عَمَلَكَ</a:t>
@@ -12384,6 +12471,7 @@
                   <a:srgbClr val="FFFFFF"/>
                 </a:solidFill>
                 <a:latin typeface="Amiri" pitchFamily="2" charset="-78"/>
+                <a:ea typeface="Amiri" pitchFamily="2" charset="-78"/>
                 <a:cs typeface="Amiri" pitchFamily="2" charset="-78"/>
               </a:rPr>
               <a:t>أَحْسَنْتُمْ! إِلَى اللِّقَاءِ</a:t>
@@ -12536,6 +12624,7 @@
                   <a:srgbClr val="D4AF37"/>
                 </a:solidFill>
                 <a:latin typeface="Amiri" pitchFamily="2" charset="-78"/>
+                <a:ea typeface="Amiri" pitchFamily="2" charset="-78"/>
                 <a:cs typeface="Amiri" pitchFamily="2" charset="-78"/>
               </a:rPr>
               <a:t>وَرْشَةُ التَّدْرِيبِ</a:t>
@@ -12669,6 +12758,7 @@
                   <a:srgbClr val="D4AF37"/>
                 </a:solidFill>
                 <a:latin typeface="Amiri" pitchFamily="2" charset="-78"/>
+                <a:ea typeface="Amiri" pitchFamily="2" charset="-78"/>
                 <a:cs typeface="Amiri" pitchFamily="2" charset="-78"/>
               </a:rPr>
               <a:t>م</a:t>
@@ -12989,6 +13079,7 @@
                   <a:srgbClr val="8A6D1E"/>
                 </a:solidFill>
                 <a:latin typeface="Amiri" pitchFamily="2" charset="-78"/>
+                <a:ea typeface="Amiri" pitchFamily="2" charset="-78"/>
                 <a:cs typeface="Amiri" pitchFamily="2" charset="-78"/>
               </a:rPr>
               <a:t>آدَابُ الصَّفِّ</a:t>
@@ -14520,6 +14611,7 @@
                   <a:srgbClr val="D4AF37"/>
                 </a:solidFill>
                 <a:latin typeface="Amiri" pitchFamily="2" charset="-78"/>
+                <a:ea typeface="Amiri" pitchFamily="2" charset="-78"/>
                 <a:cs typeface="Amiri" pitchFamily="2" charset="-78"/>
               </a:rPr>
               <a:t>م</a:t>
@@ -14840,6 +14932,7 @@
                   <a:srgbClr val="8A6D1E"/>
                 </a:solidFill>
                 <a:latin typeface="Amiri" pitchFamily="2" charset="-78"/>
+                <a:ea typeface="Amiri" pitchFamily="2" charset="-78"/>
                 <a:cs typeface="Amiri" pitchFamily="2" charset="-78"/>
               </a:rPr>
               <a:t>خَرِيطَةُ الوَرْشَةِ</a:t>
@@ -15154,6 +15247,7 @@
                   <a:srgbClr val="1B3B6F"/>
                 </a:solidFill>
                 <a:latin typeface="Amiri" pitchFamily="2" charset="-78"/>
+                <a:ea typeface="Amiri" pitchFamily="2" charset="-78"/>
                 <a:cs typeface="Amiri" pitchFamily="2" charset="-78"/>
               </a:rPr>
               <a:t>كَيْفَ</a:t>
@@ -15430,6 +15524,7 @@
                   <a:srgbClr val="1E6B52"/>
                 </a:solidFill>
                 <a:latin typeface="Amiri" pitchFamily="2" charset="-78"/>
+                <a:ea typeface="Amiri" pitchFamily="2" charset="-78"/>
                 <a:cs typeface="Amiri" pitchFamily="2" charset="-78"/>
               </a:rPr>
               <a:t>الاسْتِمَارَةُ</a:t>
@@ -15706,6 +15801,7 @@
                   <a:srgbClr val="1E6B52"/>
                 </a:solidFill>
                 <a:latin typeface="Amiri" pitchFamily="2" charset="-78"/>
+                <a:ea typeface="Amiri" pitchFamily="2" charset="-78"/>
                 <a:cs typeface="Amiri" pitchFamily="2" charset="-78"/>
               </a:rPr>
               <a:t>الرِّسَالَةُ</a:t>
@@ -15982,6 +16078,7 @@
                   <a:srgbClr val="1E6B52"/>
                 </a:solidFill>
                 <a:latin typeface="Amiri" pitchFamily="2" charset="-78"/>
+                <a:ea typeface="Amiri" pitchFamily="2" charset="-78"/>
                 <a:cs typeface="Amiri" pitchFamily="2" charset="-78"/>
               </a:rPr>
               <a:t>المَقَالُ</a:t>
@@ -16258,6 +16355,7 @@
                   <a:srgbClr val="8A6D1E"/>
                 </a:solidFill>
                 <a:latin typeface="Amiri" pitchFamily="2" charset="-78"/>
+                <a:ea typeface="Amiri" pitchFamily="2" charset="-78"/>
                 <a:cs typeface="Amiri" pitchFamily="2" charset="-78"/>
               </a:rPr>
               <a:t>قَيِّمْ</a:t>
@@ -16501,6 +16599,7 @@
                   <a:srgbClr val="D4AF37"/>
                 </a:solidFill>
                 <a:latin typeface="Amiri" pitchFamily="2" charset="-78"/>
+                <a:ea typeface="Amiri" pitchFamily="2" charset="-78"/>
                 <a:cs typeface="Amiri" pitchFamily="2" charset="-78"/>
               </a:rPr>
               <a:t>م</a:t>
@@ -16821,6 +16920,7 @@
                   <a:srgbClr val="8A6D1E"/>
                 </a:solidFill>
                 <a:latin typeface="Amiri" pitchFamily="2" charset="-78"/>
+                <a:ea typeface="Amiri" pitchFamily="2" charset="-78"/>
                 <a:cs typeface="Amiri" pitchFamily="2" charset="-78"/>
               </a:rPr>
               <a:t>امْتِحَانُ الكِتَابَةِ</a:t>
@@ -17445,6 +17545,7 @@
                   <a:srgbClr val="1B3B6F"/>
                 </a:solidFill>
                 <a:latin typeface="Amiri" pitchFamily="2" charset="-78"/>
+                <a:ea typeface="Amiri" pitchFamily="2" charset="-78"/>
                 <a:cs typeface="Amiri" pitchFamily="2" charset="-78"/>
               </a:rPr>
               <a:t>رَافَقْتُ مُمَرِّضَةً تَعْمَلُ هُنَاكَ مُنْذُ عِشْرِينَ سَنَةً</a:t>
@@ -17544,6 +17645,7 @@
                   <a:srgbClr val="1B3B6F"/>
                 </a:solidFill>
                 <a:latin typeface="Amiri" pitchFamily="2" charset="-78"/>
+                <a:ea typeface="Amiri" pitchFamily="2" charset="-78"/>
                 <a:cs typeface="Amiri" pitchFamily="2" charset="-78"/>
               </a:rPr>
               <a:t>مِنْ مَزَايَاهَا … وَمِنْ عُيُوبِهَا …</a:t>
@@ -17643,6 +17745,7 @@
                   <a:srgbClr val="1B3B6F"/>
                 </a:solidFill>
                 <a:latin typeface="Amiri" pitchFamily="2" charset="-78"/>
+                <a:ea typeface="Amiri" pitchFamily="2" charset="-78"/>
                 <a:cs typeface="Amiri" pitchFamily="2" charset="-78"/>
               </a:rPr>
               <a:t>المُمَرِّضُونَ يَسْتَحِقُّونَ رَوَاتِبَ أَعْلَى</a:t>
@@ -17814,6 +17917,7 @@
                   <a:srgbClr val="D4AF37"/>
                 </a:solidFill>
                 <a:latin typeface="Amiri" pitchFamily="2" charset="-78"/>
+                <a:ea typeface="Amiri" pitchFamily="2" charset="-78"/>
                 <a:cs typeface="Amiri" pitchFamily="2" charset="-78"/>
               </a:rPr>
               <a:t>م</a:t>
@@ -18134,6 +18238,7 @@
                   <a:srgbClr val="8A6D1E"/>
                 </a:solidFill>
                 <a:latin typeface="Amiri" pitchFamily="2" charset="-78"/>
+                <a:ea typeface="Amiri" pitchFamily="2" charset="-78"/>
                 <a:cs typeface="Amiri" pitchFamily="2" charset="-78"/>
               </a:rPr>
               <a:t>اسْتِمَارَةُ التَّدْرِيبِ العَمَلِيِّ</a:t>
@@ -18490,6 +18595,7 @@
                   <a:srgbClr val="1B3B6F"/>
                 </a:solidFill>
                 <a:latin typeface="Amiri" pitchFamily="2" charset="-78"/>
+                <a:ea typeface="Amiri" pitchFamily="2" charset="-78"/>
                 <a:cs typeface="Amiri" pitchFamily="2" charset="-78"/>
               </a:rPr>
               <a:t>الاسْمُ وَالصَّفُّ</a:t>
@@ -18734,6 +18840,7 @@
                   <a:srgbClr val="1B3B6F"/>
                 </a:solidFill>
                 <a:latin typeface="Amiri" pitchFamily="2" charset="-78"/>
+                <a:ea typeface="Amiri" pitchFamily="2" charset="-78"/>
                 <a:cs typeface="Amiri" pitchFamily="2" charset="-78"/>
               </a:rPr>
               <a:t>مَكَانُ التَّدْرِيبِ</a:t>
@@ -18978,6 +19085,7 @@
                   <a:srgbClr val="1B3B6F"/>
                 </a:solidFill>
                 <a:latin typeface="Amiri" pitchFamily="2" charset="-78"/>
+                <a:ea typeface="Amiri" pitchFamily="2" charset="-78"/>
                 <a:cs typeface="Amiri" pitchFamily="2" charset="-78"/>
               </a:rPr>
               <a:t>القِسْمُ</a:t>
@@ -19222,6 +19330,7 @@
                   <a:srgbClr val="1B3B6F"/>
                 </a:solidFill>
                 <a:latin typeface="Amiri" pitchFamily="2" charset="-78"/>
+                <a:ea typeface="Amiri" pitchFamily="2" charset="-78"/>
                 <a:cs typeface="Amiri" pitchFamily="2" charset="-78"/>
               </a:rPr>
               <a:t>المُشْرِفُ / المُشْرِفَةُ</a:t>
@@ -19466,6 +19575,7 @@
                   <a:srgbClr val="1B3B6F"/>
                 </a:solidFill>
                 <a:latin typeface="Amiri" pitchFamily="2" charset="-78"/>
+                <a:ea typeface="Amiri" pitchFamily="2" charset="-78"/>
                 <a:cs typeface="Amiri" pitchFamily="2" charset="-78"/>
               </a:rPr>
               <a:t>التَّوَارِيخُ</a:t>
@@ -19710,6 +19820,7 @@
                   <a:srgbClr val="1B3B6F"/>
                 </a:solidFill>
                 <a:latin typeface="Amiri" pitchFamily="2" charset="-78"/>
+                <a:ea typeface="Amiri" pitchFamily="2" charset="-78"/>
                 <a:cs typeface="Amiri" pitchFamily="2" charset="-78"/>
               </a:rPr>
               <a:t>سَاعَاتُ العَمَلِ</a:t>
@@ -19954,6 +20065,7 @@
                   <a:srgbClr val="1B3B6F"/>
                 </a:solidFill>
                 <a:latin typeface="Amiri" pitchFamily="2" charset="-78"/>
+                <a:ea typeface="Amiri" pitchFamily="2" charset="-78"/>
                 <a:cs typeface="Amiri" pitchFamily="2" charset="-78"/>
               </a:rPr>
               <a:t>المِهْنَةُ الَّتِي تُفَكِّرُ فِيهَا</a:t>
@@ -20133,6 +20245,7 @@
                   <a:srgbClr val="1B3B6F"/>
                 </a:solidFill>
                 <a:latin typeface="Amiri" pitchFamily="2" charset="-78"/>
+                <a:ea typeface="Amiri" pitchFamily="2" charset="-78"/>
                 <a:cs typeface="Amiri" pitchFamily="2" charset="-78"/>
               </a:rPr>
               <a:t>جُمْلَةٌ: مَاذَا تُرِيدُ أَنْ تَتَعَلَّمَ؟</a:t>
@@ -20342,6 +20455,7 @@
                   <a:srgbClr val="D4AF37"/>
                 </a:solidFill>
                 <a:latin typeface="Amiri" pitchFamily="2" charset="-78"/>
+                <a:ea typeface="Amiri" pitchFamily="2" charset="-78"/>
                 <a:cs typeface="Amiri" pitchFamily="2" charset="-78"/>
               </a:rPr>
               <a:t>م</a:t>
@@ -20662,6 +20776,7 @@
                   <a:srgbClr val="8A6D1E"/>
                 </a:solidFill>
                 <a:latin typeface="Amiri" pitchFamily="2" charset="-78"/>
+                <a:ea typeface="Amiri" pitchFamily="2" charset="-78"/>
                 <a:cs typeface="Amiri" pitchFamily="2" charset="-78"/>
               </a:rPr>
               <a:t>نَمُوذَجُ الإِجَابَةِ</a:t>
@@ -20980,6 +21095,7 @@
                   <a:srgbClr val="1B3B6F"/>
                 </a:solidFill>
                 <a:latin typeface="Amiri" pitchFamily="2" charset="-78"/>
+                <a:ea typeface="Amiri" pitchFamily="2" charset="-78"/>
                 <a:cs typeface="Amiri" pitchFamily="2" charset="-78"/>
               </a:rPr>
               <a:t>رَنَا مُحَمَّدٌ، العَاشِرُ</a:t>
@@ -21018,6 +21134,7 @@
                   <a:srgbClr val="1B3B6F"/>
                 </a:solidFill>
                 <a:latin typeface="Amiri" pitchFamily="2" charset="-78"/>
+                <a:ea typeface="Amiri" pitchFamily="2" charset="-78"/>
                 <a:cs typeface="Amiri" pitchFamily="2" charset="-78"/>
               </a:rPr>
               <a:t>الاسْمُ وَالصَّفُّ</a:t>
@@ -21159,6 +21276,7 @@
                   <a:srgbClr val="1B3B6F"/>
                 </a:solidFill>
                 <a:latin typeface="Amiri" pitchFamily="2" charset="-78"/>
+                <a:ea typeface="Amiri" pitchFamily="2" charset="-78"/>
                 <a:cs typeface="Amiri" pitchFamily="2" charset="-78"/>
               </a:rPr>
               <a:t>مُسْتَشْفَى الأَطْفَالِ</a:t>
@@ -21197,6 +21315,7 @@
                   <a:srgbClr val="1B3B6F"/>
                 </a:solidFill>
                 <a:latin typeface="Amiri" pitchFamily="2" charset="-78"/>
+                <a:ea typeface="Amiri" pitchFamily="2" charset="-78"/>
                 <a:cs typeface="Amiri" pitchFamily="2" charset="-78"/>
               </a:rPr>
               <a:t>مَكَانُ التَّدْرِيبِ</a:t>
@@ -21338,6 +21457,7 @@
                   <a:srgbClr val="1B3B6F"/>
                 </a:solidFill>
                 <a:latin typeface="Amiri" pitchFamily="2" charset="-78"/>
+                <a:ea typeface="Amiri" pitchFamily="2" charset="-78"/>
                 <a:cs typeface="Amiri" pitchFamily="2" charset="-78"/>
               </a:rPr>
               <a:t>قِسْمُ التَّمْرِيضِ</a:t>
@@ -21376,6 +21496,7 @@
                   <a:srgbClr val="1B3B6F"/>
                 </a:solidFill>
                 <a:latin typeface="Amiri" pitchFamily="2" charset="-78"/>
+                <a:ea typeface="Amiri" pitchFamily="2" charset="-78"/>
                 <a:cs typeface="Amiri" pitchFamily="2" charset="-78"/>
               </a:rPr>
               <a:t>القِسْمُ</a:t>
@@ -21517,6 +21638,7 @@
                   <a:srgbClr val="1B3B6F"/>
                 </a:solidFill>
                 <a:latin typeface="Amiri" pitchFamily="2" charset="-78"/>
+                <a:ea typeface="Amiri" pitchFamily="2" charset="-78"/>
                 <a:cs typeface="Amiri" pitchFamily="2" charset="-78"/>
               </a:rPr>
               <a:t>المُمَرِّضَةُ سُعَادُ</a:t>
@@ -21555,6 +21677,7 @@
                   <a:srgbClr val="1B3B6F"/>
                 </a:solidFill>
                 <a:latin typeface="Amiri" pitchFamily="2" charset="-78"/>
+                <a:ea typeface="Amiri" pitchFamily="2" charset="-78"/>
                 <a:cs typeface="Amiri" pitchFamily="2" charset="-78"/>
               </a:rPr>
               <a:t>المُشْرِفُ / المُشْرِفَةُ</a:t>
@@ -21696,6 +21819,7 @@
                   <a:srgbClr val="1B3B6F"/>
                 </a:solidFill>
                 <a:latin typeface="Amiri" pitchFamily="2" charset="-78"/>
+                <a:ea typeface="Amiri" pitchFamily="2" charset="-78"/>
                 <a:cs typeface="Amiri" pitchFamily="2" charset="-78"/>
               </a:rPr>
               <a:t>مِنْ ٣ إِلَى ٧ يُونْيُو</a:t>
@@ -21734,6 +21858,7 @@
                   <a:srgbClr val="1B3B6F"/>
                 </a:solidFill>
                 <a:latin typeface="Amiri" pitchFamily="2" charset="-78"/>
+                <a:ea typeface="Amiri" pitchFamily="2" charset="-78"/>
                 <a:cs typeface="Amiri" pitchFamily="2" charset="-78"/>
               </a:rPr>
               <a:t>التَّوَارِيخُ</a:t>
@@ -21875,6 +22000,7 @@
                   <a:srgbClr val="1B3B6F"/>
                 </a:solidFill>
                 <a:latin typeface="Amiri" pitchFamily="2" charset="-78"/>
+                <a:ea typeface="Amiri" pitchFamily="2" charset="-78"/>
                 <a:cs typeface="Amiri" pitchFamily="2" charset="-78"/>
               </a:rPr>
               <a:t>مِنَ الثَّامِنَةِ إِلَى الثَّالِثَةِ</a:t>
@@ -21913,6 +22039,7 @@
                   <a:srgbClr val="1B3B6F"/>
                 </a:solidFill>
                 <a:latin typeface="Amiri" pitchFamily="2" charset="-78"/>
+                <a:ea typeface="Amiri" pitchFamily="2" charset="-78"/>
                 <a:cs typeface="Amiri" pitchFamily="2" charset="-78"/>
               </a:rPr>
               <a:t>سَاعَاتُ العَمَلِ</a:t>
@@ -22054,6 +22181,7 @@
                   <a:srgbClr val="1B3B6F"/>
                 </a:solidFill>
                 <a:latin typeface="Amiri" pitchFamily="2" charset="-78"/>
+                <a:ea typeface="Amiri" pitchFamily="2" charset="-78"/>
                 <a:cs typeface="Amiri" pitchFamily="2" charset="-78"/>
               </a:rPr>
               <a:t>طَبِيبَةُ أَطْفَالٍ</a:t>
@@ -22092,6 +22220,7 @@
                   <a:srgbClr val="1B3B6F"/>
                 </a:solidFill>
                 <a:latin typeface="Amiri" pitchFamily="2" charset="-78"/>
+                <a:ea typeface="Amiri" pitchFamily="2" charset="-78"/>
                 <a:cs typeface="Amiri" pitchFamily="2" charset="-78"/>
               </a:rPr>
               <a:t>المِهْنَةُ الَّتِي تُفَكِّرُ فِيهَا</a:t>
@@ -22233,6 +22362,7 @@
                   <a:srgbClr val="1B3B6F"/>
                 </a:solidFill>
                 <a:latin typeface="Amiri" pitchFamily="2" charset="-78"/>
+                <a:ea typeface="Amiri" pitchFamily="2" charset="-78"/>
                 <a:cs typeface="Amiri" pitchFamily="2" charset="-78"/>
               </a:rPr>
               <a:t>أُرِيدُ أَنْ أَتَعَلَّمَ كَيْفَ يَتَعَامَلُ الأَطِبَّاءُ وَالمُمَرِّضَاتُ مَعَ الأَطْفَالِ الخَائِفِينَ.</a:t>
@@ -22271,6 +22401,7 @@
                   <a:srgbClr val="1B3B6F"/>
                 </a:solidFill>
                 <a:latin typeface="Amiri" pitchFamily="2" charset="-78"/>
+                <a:ea typeface="Amiri" pitchFamily="2" charset="-78"/>
                 <a:cs typeface="Amiri" pitchFamily="2" charset="-78"/>
               </a:rPr>
               <a:t>جُمْلَةٌ: مَاذَا تُرِيدُ أَنْ تَتَعَلَّمَ؟</a:t>
@@ -22480,6 +22611,7 @@
                   <a:srgbClr val="D4AF37"/>
                 </a:solidFill>
                 <a:latin typeface="Amiri" pitchFamily="2" charset="-78"/>
+                <a:ea typeface="Amiri" pitchFamily="2" charset="-78"/>
                 <a:cs typeface="Amiri" pitchFamily="2" charset="-78"/>
               </a:rPr>
               <a:t>م</a:t>
@@ -22800,6 +22932,7 @@
                   <a:srgbClr val="8A6D1E"/>
                 </a:solidFill>
                 <a:latin typeface="Amiri" pitchFamily="2" charset="-78"/>
+                <a:ea typeface="Amiri" pitchFamily="2" charset="-78"/>
                 <a:cs typeface="Amiri" pitchFamily="2" charset="-78"/>
               </a:rPr>
               <a:t>أُسْبُوعُ التَّدْرِيبِ العَمَلِيِّ</a:t>
@@ -23275,6 +23408,7 @@
                   <a:srgbClr val="1B3B6F"/>
                 </a:solidFill>
                 <a:latin typeface="Amiri" pitchFamily="2" charset="-78"/>
+                <a:ea typeface="Amiri" pitchFamily="2" charset="-78"/>
                 <a:cs typeface="Amiri" pitchFamily="2" charset="-78"/>
               </a:rPr>
               <a:t>قُمْتُ بِتَجْرِبَةِ عَمَلٍ فِي …</a:t>
@@ -23351,6 +23485,7 @@
                   <a:srgbClr val="1B3B6F"/>
                 </a:solidFill>
                 <a:latin typeface="Amiri" pitchFamily="2" charset="-78"/>
+                <a:ea typeface="Amiri" pitchFamily="2" charset="-78"/>
                 <a:cs typeface="Amiri" pitchFamily="2" charset="-78"/>
               </a:rPr>
               <a:t>عَمِلْتُ مَعَ … اسْمُهَا …</a:t>
@@ -23427,6 +23562,7 @@
                   <a:srgbClr val="1B3B6F"/>
                 </a:solidFill>
                 <a:latin typeface="Amiri" pitchFamily="2" charset="-78"/>
+                <a:ea typeface="Amiri" pitchFamily="2" charset="-78"/>
                 <a:cs typeface="Amiri" pitchFamily="2" charset="-78"/>
               </a:rPr>
               <a:t>العَمَلُ كَانَ مُتْعِبًا، لٰكِنَّهُ …</a:t>
@@ -23503,6 +23639,7 @@
                   <a:srgbClr val="1B3B6F"/>
                 </a:solidFill>
                 <a:latin typeface="Amiri" pitchFamily="2" charset="-78"/>
+                <a:ea typeface="Amiri" pitchFamily="2" charset="-78"/>
                 <a:cs typeface="Amiri" pitchFamily="2" charset="-78"/>
               </a:rPr>
               <a:t>أُرِيدُ أَنْ أَكُونَ … لِأَنَّ …</a:t>
@@ -23674,6 +23811,7 @@
                   <a:srgbClr val="D4AF37"/>
                 </a:solidFill>
                 <a:latin typeface="Amiri" pitchFamily="2" charset="-78"/>
+                <a:ea typeface="Amiri" pitchFamily="2" charset="-78"/>
                 <a:cs typeface="Amiri" pitchFamily="2" charset="-78"/>
               </a:rPr>
               <a:t>م</a:t>
@@ -23994,6 +24132,7 @@
                   <a:srgbClr val="8A6D1E"/>
                 </a:solidFill>
                 <a:latin typeface="Amiri" pitchFamily="2" charset="-78"/>
+                <a:ea typeface="Amiri" pitchFamily="2" charset="-78"/>
                 <a:cs typeface="Amiri" pitchFamily="2" charset="-78"/>
               </a:rPr>
               <a:t>نَصُّ السُّؤَالِ</a:t>
@@ -24274,6 +24413,7 @@
                   <a:srgbClr val="1B3B6F"/>
                 </a:solidFill>
                 <a:latin typeface="Amiri" pitchFamily="2" charset="-78"/>
+                <a:ea typeface="Amiri" pitchFamily="2" charset="-78"/>
                 <a:cs typeface="Amiri" pitchFamily="2" charset="-78"/>
               </a:rPr>
               <a:t>قَضَيْتِ أُسْبُوعًا فِي تَجْرِبَةِ عَمَلٍ. اكْتُبِي رِسَالَةً إِلَى صَدِيقَتِكِ (٨٠–٩٠ كَلِمَةً).</a:t>
@@ -24415,6 +24555,7 @@
                   <a:srgbClr val="1B3B6F"/>
                 </a:solidFill>
                 <a:latin typeface="Amiri" pitchFamily="2" charset="-78"/>
+                <a:ea typeface="Amiri" pitchFamily="2" charset="-78"/>
                 <a:cs typeface="Amiri" pitchFamily="2" charset="-78"/>
               </a:rPr>
               <a:t>أَيْنَ عَمِلْتِ؟ وَمَعَ مَنْ؟</a:t>
@@ -24556,6 +24697,7 @@
                   <a:srgbClr val="1B3B6F"/>
                 </a:solidFill>
                 <a:latin typeface="Amiri" pitchFamily="2" charset="-78"/>
+                <a:ea typeface="Amiri" pitchFamily="2" charset="-78"/>
                 <a:cs typeface="Amiri" pitchFamily="2" charset="-78"/>
               </a:rPr>
               <a:t>مَاذَا فَعَلْتِ هُنَاكَ؟</a:t>
@@ -24697,6 +24839,7 @@
                   <a:srgbClr val="1B3B6F"/>
                 </a:solidFill>
                 <a:latin typeface="Amiri" pitchFamily="2" charset="-78"/>
+                <a:ea typeface="Amiri" pitchFamily="2" charset="-78"/>
                 <a:cs typeface="Amiri" pitchFamily="2" charset="-78"/>
               </a:rPr>
               <a:t>مَا رَأْيُكِ فِي هٰذِهِ المِهْنَةِ؟</a:t>
@@ -24838,6 +24981,7 @@
                   <a:srgbClr val="1B3B6F"/>
                 </a:solidFill>
                 <a:latin typeface="Amiri" pitchFamily="2" charset="-78"/>
+                <a:ea typeface="Amiri" pitchFamily="2" charset="-78"/>
                 <a:cs typeface="Amiri" pitchFamily="2" charset="-78"/>
               </a:rPr>
               <a:t>مَا المِهْنَةُ الَّتِي تُرِيدِينَهَا فِي المُسْتَقْبَلِ؟ وَلِمَاذَا؟</a:t>
@@ -25047,6 +25191,7 @@
                   <a:srgbClr val="D4AF37"/>
                 </a:solidFill>
                 <a:latin typeface="Amiri" pitchFamily="2" charset="-78"/>
+                <a:ea typeface="Amiri" pitchFamily="2" charset="-78"/>
                 <a:cs typeface="Amiri" pitchFamily="2" charset="-78"/>
               </a:rPr>
               <a:t>م</a:t>
@@ -25367,6 +25512,7 @@
                   <a:srgbClr val="8A6D1E"/>
                 </a:solidFill>
                 <a:latin typeface="Amiri" pitchFamily="2" charset="-78"/>
+                <a:ea typeface="Amiri" pitchFamily="2" charset="-78"/>
                 <a:cs typeface="Amiri" pitchFamily="2" charset="-78"/>
               </a:rPr>
               <a:t>قَوَالِبُ الكِتَابَةِ</a:t>
@@ -25647,6 +25793,7 @@
                   <a:srgbClr val="1B3B6F"/>
                 </a:solidFill>
                 <a:latin typeface="Amiri" pitchFamily="2" charset="-78"/>
+                <a:ea typeface="Amiri" pitchFamily="2" charset="-78"/>
                 <a:cs typeface="Amiri" pitchFamily="2" charset="-78"/>
               </a:rPr>
               <a:t>مَرْحَبًا يَا ______ ، كَيْفَ حَالُكِ؟</a:t>
@@ -25853,6 +26000,7 @@
                   <a:srgbClr val="1B3B6F"/>
                 </a:solidFill>
                 <a:latin typeface="Amiri" pitchFamily="2" charset="-78"/>
+                <a:ea typeface="Amiri" pitchFamily="2" charset="-78"/>
                 <a:cs typeface="Amiri" pitchFamily="2" charset="-78"/>
               </a:rPr>
               <a:t>فِي الأُسْبُوعِ المَاضِي قُمْتُ بِتَجْرِبَةِ عَمَلٍ فِي ______ ، وَعَمِلْتُ مَعَ ______ .</a:t>
@@ -26059,6 +26207,7 @@
                   <a:srgbClr val="1B3B6F"/>
                 </a:solidFill>
                 <a:latin typeface="Amiri" pitchFamily="2" charset="-78"/>
+                <a:ea typeface="Amiri" pitchFamily="2" charset="-78"/>
                 <a:cs typeface="Amiri" pitchFamily="2" charset="-78"/>
               </a:rPr>
               <a:t>كُنْتُ أُسَاعِدُ ______ فِي ______ .</a:t>
@@ -26265,6 +26414,7 @@
                   <a:srgbClr val="1B3B6F"/>
                 </a:solidFill>
                 <a:latin typeface="Amiri" pitchFamily="2" charset="-78"/>
+                <a:ea typeface="Amiri" pitchFamily="2" charset="-78"/>
                 <a:cs typeface="Amiri" pitchFamily="2" charset="-78"/>
               </a:rPr>
               <a:t>العَمَلُ كَانَ ______ ، لٰكِنَّهُ ______ . فِي رَأْيِي ______ .</a:t>
@@ -26471,6 +26621,7 @@
                   <a:srgbClr val="1B3B6F"/>
                 </a:solidFill>
                 <a:latin typeface="Amiri" pitchFamily="2" charset="-78"/>
+                <a:ea typeface="Amiri" pitchFamily="2" charset="-78"/>
                 <a:cs typeface="Amiri" pitchFamily="2" charset="-78"/>
               </a:rPr>
               <a:t>فِي المُسْتَقْبَلِ أُرِيدُ أَنْ أَكُونَ ______ ، لِأَنَّ ______ .</a:t>
@@ -26677,6 +26828,7 @@
                   <a:srgbClr val="1B3B6F"/>
                 </a:solidFill>
                 <a:latin typeface="Amiri" pitchFamily="2" charset="-78"/>
+                <a:ea typeface="Amiri" pitchFamily="2" charset="-78"/>
                 <a:cs typeface="Amiri" pitchFamily="2" charset="-78"/>
               </a:rPr>
               <a:t>مَعَ حُبِّي، ______</a:t>
@@ -26916,13 +27068,9 @@
     <a:fontScheme name="Office">
       <a:majorFont>
         <a:latin typeface="Calibri Light" panose="020F0302020204030204"/>
-        <a:ea typeface=""/>
-        <a:cs typeface=""/>
-        <a:font script="Jpan" typeface="游ゴシック Light"/>
-        <a:font script="Hang" typeface="맑은 고딕"/>
-        <a:font script="Hans" typeface="等线 Light"/>
-        <a:font script="Hant" typeface="新細明體"/>
-        <a:font script="Arab" typeface="Times New Roman"/>
+        <a:ea typeface="Amiri" pitchFamily="2" charset="-78"/>
+        <a:cs typeface="Amiri" pitchFamily="2" charset="-78"/>
+        <a:font script="Arab" typeface="Amiri"/>
         <a:font script="Hebr" typeface="Times New Roman"/>
         <a:font script="Thai" typeface="Angsana New"/>
         <a:font script="Ethi" typeface="Nyala"/>
@@ -26968,13 +27116,9 @@
       </a:majorFont>
       <a:minorFont>
         <a:latin typeface="Calibri" panose="020F0502020204030204"/>
-        <a:ea typeface=""/>
-        <a:cs typeface=""/>
-        <a:font script="Jpan" typeface="游ゴシック"/>
-        <a:font script="Hang" typeface="맑은 고딕"/>
-        <a:font script="Hans" typeface="等线"/>
-        <a:font script="Hant" typeface="新細明體"/>
-        <a:font script="Arab" typeface="Arial"/>
+        <a:ea typeface="Amiri" pitchFamily="2" charset="-78"/>
+        <a:cs typeface="Amiri" pitchFamily="2" charset="-78"/>
+        <a:font script="Arab" typeface="Amiri"/>
         <a:font script="Hebr" typeface="Arial"/>
         <a:font script="Thai" typeface="Cordia New"/>
         <a:font script="Ethi" typeface="Nyala"/>

--- a/Topic_D/Exam_Practice/TD-L06_Writing_Workshop_Jobs_and_Professions.pptx
+++ b/Topic_D/Exam_Practice/TD-L06_Writing_Workshop_Jobs_and_Professions.pptx
@@ -3848,7 +3848,7 @@
                 <a:solidFill>
                   <a:srgbClr val="FFFFFF"/>
                 </a:solidFill>
-                <a:latin typeface="Calibri" pitchFamily="34" charset="0"/>
+                <a:latin typeface="Amiri" pitchFamily="2" charset="-78"/>
                 <a:ea typeface="Amiri" pitchFamily="2" charset="-78"/>
                 <a:cs typeface="Amiri" pitchFamily="2" charset="-78"/>
               </a:rPr>
@@ -3914,7 +3914,7 @@
                 <a:solidFill>
                   <a:srgbClr val="FFFFFF"/>
                 </a:solidFill>
-                <a:latin typeface="Calibri" pitchFamily="34" charset="0"/>
+                <a:latin typeface="Amiri" pitchFamily="2" charset="-78"/>
                 <a:ea typeface="Amiri" pitchFamily="2" charset="-78"/>
                 <a:cs typeface="Amiri" pitchFamily="2" charset="-78"/>
               </a:rPr>
@@ -3980,7 +3980,7 @@
                 <a:solidFill>
                   <a:srgbClr val="FFFFFF"/>
                 </a:solidFill>
-                <a:latin typeface="Calibri" pitchFamily="34" charset="0"/>
+                <a:latin typeface="Amiri" pitchFamily="2" charset="-78"/>
                 <a:ea typeface="Amiri" pitchFamily="2" charset="-78"/>
                 <a:cs typeface="Amiri" pitchFamily="2" charset="-78"/>
               </a:rPr>
@@ -4046,7 +4046,7 @@
                 <a:solidFill>
                   <a:srgbClr val="FFFFFF"/>
                 </a:solidFill>
-                <a:latin typeface="Calibri" pitchFamily="34" charset="0"/>
+                <a:latin typeface="Amiri" pitchFamily="2" charset="-78"/>
                 <a:ea typeface="Amiri" pitchFamily="2" charset="-78"/>
                 <a:cs typeface="Amiri" pitchFamily="2" charset="-78"/>
               </a:rPr>
@@ -4844,7 +4844,7 @@
                 <a:solidFill>
                   <a:srgbClr val="FFFFFF"/>
                 </a:solidFill>
-                <a:latin typeface="Calibri" pitchFamily="34" charset="0"/>
+                <a:latin typeface="Amiri" pitchFamily="2" charset="-78"/>
                 <a:ea typeface="Amiri" pitchFamily="2" charset="-78"/>
                 <a:cs typeface="Amiri" pitchFamily="2" charset="-78"/>
               </a:rPr>
@@ -4910,7 +4910,7 @@
                 <a:solidFill>
                   <a:srgbClr val="FFFFFF"/>
                 </a:solidFill>
-                <a:latin typeface="Calibri" pitchFamily="34" charset="0"/>
+                <a:latin typeface="Amiri" pitchFamily="2" charset="-78"/>
                 <a:ea typeface="Amiri" pitchFamily="2" charset="-78"/>
                 <a:cs typeface="Amiri" pitchFamily="2" charset="-78"/>
               </a:rPr>
@@ -4976,7 +4976,7 @@
                 <a:solidFill>
                   <a:srgbClr val="FFFFFF"/>
                 </a:solidFill>
-                <a:latin typeface="Calibri" pitchFamily="34" charset="0"/>
+                <a:latin typeface="Amiri" pitchFamily="2" charset="-78"/>
                 <a:ea typeface="Amiri" pitchFamily="2" charset="-78"/>
                 <a:cs typeface="Amiri" pitchFamily="2" charset="-78"/>
               </a:rPr>
@@ -5042,7 +5042,7 @@
                 <a:solidFill>
                   <a:srgbClr val="FFFFFF"/>
                 </a:solidFill>
-                <a:latin typeface="Calibri" pitchFamily="34" charset="0"/>
+                <a:latin typeface="Amiri" pitchFamily="2" charset="-78"/>
                 <a:ea typeface="Amiri" pitchFamily="2" charset="-78"/>
                 <a:cs typeface="Amiri" pitchFamily="2" charset="-78"/>
               </a:rPr>
@@ -8602,7 +8602,7 @@
                 <a:solidFill>
                   <a:srgbClr val="FFFFFF"/>
                 </a:solidFill>
-                <a:latin typeface="Calibri" pitchFamily="34" charset="0"/>
+                <a:latin typeface="Amiri" pitchFamily="2" charset="-78"/>
                 <a:ea typeface="Amiri" pitchFamily="2" charset="-78"/>
                 <a:cs typeface="Amiri" pitchFamily="2" charset="-78"/>
               </a:rPr>
@@ -8668,7 +8668,7 @@
                 <a:solidFill>
                   <a:srgbClr val="FFFFFF"/>
                 </a:solidFill>
-                <a:latin typeface="Calibri" pitchFamily="34" charset="0"/>
+                <a:latin typeface="Amiri" pitchFamily="2" charset="-78"/>
                 <a:ea typeface="Amiri" pitchFamily="2" charset="-78"/>
                 <a:cs typeface="Amiri" pitchFamily="2" charset="-78"/>
               </a:rPr>
@@ -8734,7 +8734,7 @@
                 <a:solidFill>
                   <a:srgbClr val="FFFFFF"/>
                 </a:solidFill>
-                <a:latin typeface="Calibri" pitchFamily="34" charset="0"/>
+                <a:latin typeface="Amiri" pitchFamily="2" charset="-78"/>
                 <a:ea typeface="Amiri" pitchFamily="2" charset="-78"/>
                 <a:cs typeface="Amiri" pitchFamily="2" charset="-78"/>
               </a:rPr>
@@ -8800,7 +8800,7 @@
                 <a:solidFill>
                   <a:srgbClr val="FFFFFF"/>
                 </a:solidFill>
-                <a:latin typeface="Calibri" pitchFamily="34" charset="0"/>
+                <a:latin typeface="Amiri" pitchFamily="2" charset="-78"/>
                 <a:ea typeface="Amiri" pitchFamily="2" charset="-78"/>
                 <a:cs typeface="Amiri" pitchFamily="2" charset="-78"/>
               </a:rPr>
@@ -9587,7 +9587,7 @@
                 <a:solidFill>
                   <a:srgbClr val="FFFFFF"/>
                 </a:solidFill>
-                <a:latin typeface="Calibri" pitchFamily="34" charset="0"/>
+                <a:latin typeface="Amiri" pitchFamily="2" charset="-78"/>
                 <a:ea typeface="Amiri" pitchFamily="2" charset="-78"/>
                 <a:cs typeface="Amiri" pitchFamily="2" charset="-78"/>
               </a:rPr>
@@ -9653,7 +9653,7 @@
                 <a:solidFill>
                   <a:srgbClr val="FFFFFF"/>
                 </a:solidFill>
-                <a:latin typeface="Calibri" pitchFamily="34" charset="0"/>
+                <a:latin typeface="Amiri" pitchFamily="2" charset="-78"/>
                 <a:ea typeface="Amiri" pitchFamily="2" charset="-78"/>
                 <a:cs typeface="Amiri" pitchFamily="2" charset="-78"/>
               </a:rPr>
@@ -9719,7 +9719,7 @@
                 <a:solidFill>
                   <a:srgbClr val="FFFFFF"/>
                 </a:solidFill>
-                <a:latin typeface="Calibri" pitchFamily="34" charset="0"/>
+                <a:latin typeface="Amiri" pitchFamily="2" charset="-78"/>
                 <a:ea typeface="Amiri" pitchFamily="2" charset="-78"/>
                 <a:cs typeface="Amiri" pitchFamily="2" charset="-78"/>
               </a:rPr>
@@ -9785,7 +9785,7 @@
                 <a:solidFill>
                   <a:srgbClr val="FFFFFF"/>
                 </a:solidFill>
-                <a:latin typeface="Calibri" pitchFamily="34" charset="0"/>
+                <a:latin typeface="Amiri" pitchFamily="2" charset="-78"/>
                 <a:ea typeface="Amiri" pitchFamily="2" charset="-78"/>
                 <a:cs typeface="Amiri" pitchFamily="2" charset="-78"/>
               </a:rPr>
@@ -10572,7 +10572,7 @@
                 <a:solidFill>
                   <a:srgbClr val="FFFFFF"/>
                 </a:solidFill>
-                <a:latin typeface="Calibri" pitchFamily="34" charset="0"/>
+                <a:latin typeface="Amiri" pitchFamily="2" charset="-78"/>
                 <a:ea typeface="Amiri" pitchFamily="2" charset="-78"/>
                 <a:cs typeface="Amiri" pitchFamily="2" charset="-78"/>
               </a:rPr>
@@ -10638,7 +10638,7 @@
                 <a:solidFill>
                   <a:srgbClr val="FFFFFF"/>
                 </a:solidFill>
-                <a:latin typeface="Calibri" pitchFamily="34" charset="0"/>
+                <a:latin typeface="Amiri" pitchFamily="2" charset="-78"/>
                 <a:ea typeface="Amiri" pitchFamily="2" charset="-78"/>
                 <a:cs typeface="Amiri" pitchFamily="2" charset="-78"/>
               </a:rPr>
@@ -10704,7 +10704,7 @@
                 <a:solidFill>
                   <a:srgbClr val="FFFFFF"/>
                 </a:solidFill>
-                <a:latin typeface="Calibri" pitchFamily="34" charset="0"/>
+                <a:latin typeface="Amiri" pitchFamily="2" charset="-78"/>
                 <a:ea typeface="Amiri" pitchFamily="2" charset="-78"/>
                 <a:cs typeface="Amiri" pitchFamily="2" charset="-78"/>
               </a:rPr>
@@ -10770,7 +10770,7 @@
                 <a:solidFill>
                   <a:srgbClr val="FFFFFF"/>
                 </a:solidFill>
-                <a:latin typeface="Calibri" pitchFamily="34" charset="0"/>
+                <a:latin typeface="Amiri" pitchFamily="2" charset="-78"/>
                 <a:ea typeface="Amiri" pitchFamily="2" charset="-78"/>
                 <a:cs typeface="Amiri" pitchFamily="2" charset="-78"/>
               </a:rPr>
